--- a/classes/parte-11-devsecops-y-seguridad-del-sdlc/239-dast-analisis-dinamico-de-aplicaciones/clase-239-presentacion.pptx
+++ b/classes/parte-11-devsecops-y-seguridad-del-sdlc/239-dast-analisis-dinamico-de-aplicaciones/clase-239-presentacion.pptx
@@ -17,6 +17,10 @@
     <p:sldId id="265" r:id="rId16"/>
     <p:sldId id="266" r:id="rId17"/>
     <p:sldId id="267" r:id="rId18"/>
+    <p:sldId id="268" r:id="rId19"/>
+    <p:sldId id="269" r:id="rId20"/>
+    <p:sldId id="270" r:id="rId21"/>
+    <p:sldId id="271" r:id="rId22"/>
   </p:sldIdLst>
   <p:sldSz cx="9144000" cy="6858000" type="screen4x3"/>
   <p:notesSz cx="6858000" cy="9144000"/>
@@ -3198,7 +3202,7 @@
                   <a:srgbClr val="0B3D2E"/>
                 </a:solidFill>
               </a:rPr>
-              <a:t>⚠️ Errores comunes</a:t>
+              <a:t>🧪 Laboratorio guiado</a:t>
             </a:r>
           </a:p>
         </p:txBody>
@@ -3236,67 +3240,97 @@
                   <a:srgbClr val="22282E"/>
                 </a:solidFill>
               </a:rPr>
-              <a:t>•  ZAP no encuentra vulnerabilidades en zonas privadas — Falta contexto de autenticación. Configura usuario y sesión en ZAP.</a:t>
-            </a:r>
-          </a:p>
-          <a:p>
-            <a:pPr>
-              <a:spcAft>
-                <a:spcPts val="600"/>
-              </a:spcAft>
-            </a:pPr>
-            <a:r>
-              <a:rPr sz="1500">
-                <a:solidFill>
-                  <a:srgbClr val="22282E"/>
-                </a:solidFill>
-              </a:rPr>
-              <a:t>•  El active scan corrompe datos de staging — Es esperado: envía ataques reales. Usa datos desechables y snapshots.</a:t>
-            </a:r>
-          </a:p>
-          <a:p>
-            <a:pPr>
-              <a:spcAft>
-                <a:spcPts val="600"/>
-              </a:spcAft>
-            </a:pPr>
-            <a:r>
-              <a:rPr sz="1500">
-                <a:solidFill>
-                  <a:srgbClr val="22282E"/>
-                </a:solidFill>
-              </a:rPr>
-              <a:t>•  Cobertura baja del escaneo — El spider no descubre rutas SPA/JS. Usa el AJAX Spider o alimenta URLs manualmente.</a:t>
-            </a:r>
-          </a:p>
-          <a:p>
-            <a:pPr>
-              <a:spcAft>
-                <a:spcPts val="600"/>
-              </a:spcAft>
-            </a:pPr>
-            <a:r>
-              <a:rPr sz="1500">
-                <a:solidFill>
-                  <a:srgbClr val="22282E"/>
-                </a:solidFill>
-              </a:rPr>
-              <a:t>•  El pipeline falla siempre con las mismas alertas — Falsos positivos no suprimidos. Añade un fichero de reglas con IGNORE.</a:t>
-            </a:r>
-          </a:p>
-          <a:p>
-            <a:pPr>
-              <a:spcAft>
-                <a:spcPts val="600"/>
-              </a:spcAft>
-            </a:pPr>
-            <a:r>
-              <a:rPr sz="1500">
-                <a:solidFill>
-                  <a:srgbClr val="22282E"/>
-                </a:solidFill>
-              </a:rPr>
-              <a:t>•  Se intenta escanear producción — Riesgo legal y de disponibilidad. DAST activo solo en entornos propios/autorizados.</a:t>
+              <a:t>•  Despliega tu objetivo. Levanta Juice Shop en localhost:3000 (es una app diseñada para practicar).</a:t>
+            </a:r>
+          </a:p>
+          <a:p>
+            <a:pPr>
+              <a:spcAft>
+                <a:spcPts val="600"/>
+              </a:spcAft>
+            </a:pPr>
+            <a:r>
+              <a:rPr sz="1500">
+                <a:solidFill>
+                  <a:srgbClr val="22282E"/>
+                </a:solidFill>
+              </a:rPr>
+              <a:t>•  Escaneo baseline (pasivo):</a:t>
+            </a:r>
+          </a:p>
+          <a:p>
+            <a:pPr>
+              <a:spcAft>
+                <a:spcPts val="600"/>
+              </a:spcAft>
+            </a:pPr>
+            <a:r>
+              <a:rPr sz="1500">
+                <a:solidFill>
+                  <a:srgbClr val="22282E"/>
+                </a:solidFill>
+              </a:rPr>
+              <a:t>•  Revisa el informe: cabeceras faltantes (CSP, HSTS), cookies inseguras.</a:t>
+            </a:r>
+          </a:p>
+          <a:p>
+            <a:pPr>
+              <a:spcAft>
+                <a:spcPts val="600"/>
+              </a:spcAft>
+            </a:pPr>
+            <a:r>
+              <a:rPr sz="1500">
+                <a:solidFill>
+                  <a:srgbClr val="22282E"/>
+                </a:solidFill>
+              </a:rPr>
+              <a:t>•  Escaneo full/activo contra staging (nunca producción):</a:t>
+            </a:r>
+          </a:p>
+          <a:p>
+            <a:pPr>
+              <a:spcAft>
+                <a:spcPts val="600"/>
+              </a:spcAft>
+            </a:pPr>
+            <a:r>
+              <a:rPr sz="1500">
+                <a:solidFill>
+                  <a:srgbClr val="22282E"/>
+                </a:solidFill>
+              </a:rPr>
+              <a:t>•  Configura autenticación. En la GUI de ZAP define un contexto, un usuario y el método de login para que el spider acceda a zonas protegidas; reejecuta el active scan autenticado.</a:t>
+            </a:r>
+          </a:p>
+          <a:p>
+            <a:pPr>
+              <a:spcAft>
+                <a:spcPts val="600"/>
+              </a:spcAft>
+            </a:pPr>
+            <a:r>
+              <a:rPr sz="1500">
+                <a:solidFill>
+                  <a:srgbClr val="22282E"/>
+                </a:solidFill>
+              </a:rPr>
+              <a:t>•  Integra en CI. Añade un job que (a) despliegue la app en un contenedor efímero, (b) corra zap-baseline.py, (c) publique el informe y (d) falle si hay hallazgos por encima del umbral. Usa la GitHub…</a:t>
+            </a:r>
+          </a:p>
+          <a:p>
+            <a:pPr>
+              <a:spcAft>
+                <a:spcPts val="600"/>
+              </a:spcAft>
+            </a:pPr>
+            <a:r>
+              <a:rPr sz="1500">
+                <a:solidFill>
+                  <a:srgbClr val="22282E"/>
+                </a:solidFill>
+              </a:rPr>
+              <a:t>•  Tuning. Marca falsos positivos en un fichero de reglas (-c reglas.conf) para bajarlos a WARN/IGNORE y reejecuta.</a:t>
             </a:r>
           </a:p>
         </p:txBody>
@@ -3347,7 +3381,7 @@
                   <a:srgbClr val="0B3D2E"/>
                 </a:solidFill>
               </a:rPr>
-              <a:t>❓ Preguntas frecuentes</a:t>
+              <a:t>✍️ Ejercicios</a:t>
             </a:r>
           </a:p>
         </p:txBody>
@@ -3385,97 +3419,82 @@
                   <a:srgbClr val="22282E"/>
                 </a:solidFill>
               </a:rPr>
-              <a:t>•  ❓ ¿Puedo correr DAST en cada PR?</a:t>
-            </a:r>
-          </a:p>
-          <a:p>
-            <a:pPr>
-              <a:spcAft>
-                <a:spcPts val="600"/>
-              </a:spcAft>
-            </a:pPr>
-            <a:r>
-              <a:rPr sz="1500">
-                <a:solidFill>
-                  <a:srgbClr val="22282E"/>
-                </a:solidFill>
-              </a:rPr>
-              <a:t>•  El baseline (pasivo) sí, es rápido y seguro. El active scan es más lento; suele correrse en nightly o antes de release contra staging.</a:t>
-            </a:r>
-          </a:p>
-          <a:p>
-            <a:pPr>
-              <a:spcAft>
-                <a:spcPts val="600"/>
-              </a:spcAft>
-            </a:pPr>
-            <a:r>
-              <a:rPr sz="1500">
-                <a:solidFill>
-                  <a:srgbClr val="22282E"/>
-                </a:solidFill>
-              </a:rPr>
-              <a:t>•  ❓ ¿DAST reemplaza al pentest manual?</a:t>
-            </a:r>
-          </a:p>
-          <a:p>
-            <a:pPr>
-              <a:spcAft>
-                <a:spcPts val="600"/>
-              </a:spcAft>
-            </a:pPr>
-            <a:r>
-              <a:rPr sz="1500">
-                <a:solidFill>
-                  <a:srgbClr val="22282E"/>
-                </a:solidFill>
-              </a:rPr>
-              <a:t>•  No. Automatiza la detección de fallos comunes, pero un pentester encuentra lógica de negocio, cadenas de explotación y bypass de autorización que ninguna herramienta detecta.</a:t>
-            </a:r>
-          </a:p>
-          <a:p>
-            <a:pPr>
-              <a:spcAft>
-                <a:spcPts val="600"/>
-              </a:spcAft>
-            </a:pPr>
-            <a:r>
-              <a:rPr sz="1500">
-                <a:solidFill>
-                  <a:srgbClr val="22282E"/>
-                </a:solidFill>
-              </a:rPr>
-              <a:t>•  ❓ ¿Por qué DAST no ve una inyección que SAST sí?</a:t>
-            </a:r>
-          </a:p>
-          <a:p>
-            <a:pPr>
-              <a:spcAft>
-                <a:spcPts val="600"/>
-              </a:spcAft>
-            </a:pPr>
-            <a:r>
-              <a:rPr sz="1500">
-                <a:solidFill>
-                  <a:srgbClr val="22282E"/>
-                </a:solidFill>
-              </a:rPr>
-              <a:t>•  Si el crawler no llega a esa ruta o no genera el input adecuado, no la ejercita. La cobertura de DAST depende del descubrimiento; por eso SAST y DAST son complementarios.</a:t>
-            </a:r>
-          </a:p>
-          <a:p>
-            <a:pPr>
-              <a:spcAft>
-                <a:spcPts val="600"/>
-              </a:spcAft>
-            </a:pPr>
-            <a:r>
-              <a:rPr sz="1500">
-                <a:solidFill>
-                  <a:srgbClr val="22282E"/>
-                </a:solidFill>
-              </a:rPr>
-              <a:t>•  ❓ ¿Es seguro correr ZAP contra mi app?</a:t>
+              <a:t>•  Ejecuta un baseline scan y lista las cabeceras de seguridad ausentes.</a:t>
+            </a:r>
+          </a:p>
+          <a:p>
+            <a:pPr>
+              <a:spcAft>
+                <a:spcPts val="600"/>
+              </a:spcAft>
+            </a:pPr>
+            <a:r>
+              <a:rPr sz="1500">
+                <a:solidFill>
+                  <a:srgbClr val="22282E"/>
+                </a:solidFill>
+              </a:rPr>
+              <a:t>•  Configura ZAP para escanear una zona autenticada de la app.</a:t>
+            </a:r>
+          </a:p>
+          <a:p>
+            <a:pPr>
+              <a:spcAft>
+                <a:spcPts val="600"/>
+              </a:spcAft>
+            </a:pPr>
+            <a:r>
+              <a:rPr sz="1500">
+                <a:solidFill>
+                  <a:srgbClr val="22282E"/>
+                </a:solidFill>
+              </a:rPr>
+              <a:t>•  Integra zap-baseline en un pipeline y haz que falle con hallazgos High.</a:t>
+            </a:r>
+          </a:p>
+          <a:p>
+            <a:pPr>
+              <a:spcAft>
+                <a:spcPts val="600"/>
+              </a:spcAft>
+            </a:pPr>
+            <a:r>
+              <a:rPr sz="1500">
+                <a:solidFill>
+                  <a:srgbClr val="22282E"/>
+                </a:solidFill>
+              </a:rPr>
+              <a:t>•  Crea un fichero de reglas que suprima dos falsos positivos.</a:t>
+            </a:r>
+          </a:p>
+          <a:p>
+            <a:pPr>
+              <a:spcAft>
+                <a:spcPts val="600"/>
+              </a:spcAft>
+            </a:pPr>
+            <a:r>
+              <a:rPr sz="1500">
+                <a:solidFill>
+                  <a:srgbClr val="22282E"/>
+                </a:solidFill>
+              </a:rPr>
+              <a:t>•  Compara el tiempo y la cobertura entre baseline y full scan.</a:t>
+            </a:r>
+          </a:p>
+          <a:p>
+            <a:pPr>
+              <a:spcAft>
+                <a:spcPts val="600"/>
+              </a:spcAft>
+            </a:pPr>
+            <a:r>
+              <a:rPr sz="1500">
+                <a:solidFill>
+                  <a:srgbClr val="22282E"/>
+                </a:solidFill>
+              </a:rPr>
+              <a:t>•  Diseña un escenario donde IAST sería mejor que DAST puro.</a:t>
             </a:r>
           </a:p>
         </p:txBody>
@@ -3526,7 +3545,7 @@
                   <a:srgbClr val="0B3D2E"/>
                 </a:solidFill>
               </a:rPr>
-              <a:t>🔗 Referencias</a:t>
+              <a:t>📝 Reto verificable</a:t>
             </a:r>
           </a:p>
         </p:txBody>
@@ -3564,6 +3583,483 @@
                   <a:srgbClr val="22282E"/>
                 </a:solidFill>
               </a:rPr>
+              <a:t>•  Automatiza un escaneo DAST autenticado en CI contra un entorno de staging efímero.</a:t>
+            </a:r>
+          </a:p>
+          <a:p>
+            <a:pPr>
+              <a:spcAft>
+                <a:spcPts val="600"/>
+              </a:spcAft>
+            </a:pPr>
+            <a:r>
+              <a:rPr sz="1500">
+                <a:solidFill>
+                  <a:srgbClr val="22282E"/>
+                </a:solidFill>
+              </a:rPr>
+              <a:t>•  Criterio de aceptación: (a) el pipeline despliega la app en un contenedor temporal; (b)</a:t>
+            </a:r>
+          </a:p>
+          <a:p>
+            <a:pPr>
+              <a:spcAft>
+                <a:spcPts val="600"/>
+              </a:spcAft>
+            </a:pPr>
+            <a:r>
+              <a:rPr sz="1500">
+                <a:solidFill>
+                  <a:srgbClr val="22282E"/>
+                </a:solidFill>
+              </a:rPr>
+              <a:t>•  ZAP escanea con sesión autenticada válida; (c) el job publica el informe HTML como artefacto;</a:t>
+            </a:r>
+          </a:p>
+          <a:p>
+            <a:pPr>
+              <a:spcAft>
+                <a:spcPts val="600"/>
+              </a:spcAft>
+            </a:pPr>
+            <a:r>
+              <a:rPr sz="1500">
+                <a:solidFill>
+                  <a:srgbClr val="22282E"/>
+                </a:solidFill>
+              </a:rPr>
+              <a:t>•  (d) el build falla si hay vulnerabilidades por encima de un umbral definido; y (e) existe un</a:t>
+            </a:r>
+          </a:p>
+          <a:p>
+            <a:pPr>
+              <a:spcAft>
+                <a:spcPts val="600"/>
+              </a:spcAft>
+            </a:pPr>
+            <a:r>
+              <a:rPr sz="1500">
+                <a:solidFill>
+                  <a:srgbClr val="22282E"/>
+                </a:solidFill>
+              </a:rPr>
+              <a:t>•  fichero de reglas que suprime al menos un falso positivo justificado.</a:t>
+            </a:r>
+          </a:p>
+        </p:txBody>
+      </p:sp>
+    </p:spTree>
+  </p:cSld>
+  <p:clrMapOvr>
+    <a:masterClrMapping/>
+  </p:clrMapOvr>
+</p:sld>
+</file>
+
+<file path=ppt/slides/slide13.xml><?xml version="1.0" encoding="utf-8"?>
+<p:sld xmlns:a="http://schemas.openxmlformats.org/drawingml/2006/main" xmlns:p="http://schemas.openxmlformats.org/presentationml/2006/main" xmlns:r="http://schemas.openxmlformats.org/officeDocument/2006/relationships">
+  <p:cSld>
+    <p:spTree>
+      <p:nvGrpSpPr>
+        <p:cNvPr id="1" name=""/>
+        <p:cNvGrpSpPr/>
+        <p:nvPr/>
+      </p:nvGrpSpPr>
+      <p:grpSpPr/>
+      <p:sp>
+        <p:nvSpPr>
+          <p:cNvPr id="2" name="TextBox 1"/>
+          <p:cNvSpPr txBox="1"/>
+          <p:nvPr/>
+        </p:nvSpPr>
+        <p:spPr>
+          <a:xfrm>
+            <a:off x="457200" y="320040"/>
+            <a:ext cx="8229600" cy="822960"/>
+          </a:xfrm>
+          <a:prstGeom prst="rect">
+            <a:avLst/>
+          </a:prstGeom>
+          <a:noFill/>
+        </p:spPr>
+        <p:txBody>
+          <a:bodyPr wrap="square">
+            <a:spAutoFit/>
+          </a:bodyPr>
+          <a:lstStyle/>
+          <a:p>
+            <a:r>
+              <a:rPr sz="2600" b="1">
+                <a:solidFill>
+                  <a:srgbClr val="0B3D2E"/>
+                </a:solidFill>
+              </a:rPr>
+              <a:t>⚠️ Errores comunes</a:t>
+            </a:r>
+          </a:p>
+        </p:txBody>
+      </p:sp>
+      <p:sp>
+        <p:nvSpPr>
+          <p:cNvPr id="3" name="TextBox 2"/>
+          <p:cNvSpPr txBox="1"/>
+          <p:nvPr/>
+        </p:nvSpPr>
+        <p:spPr>
+          <a:xfrm>
+            <a:off x="457200" y="1280160"/>
+            <a:ext cx="8229600" cy="4937760"/>
+          </a:xfrm>
+          <a:prstGeom prst="rect">
+            <a:avLst/>
+          </a:prstGeom>
+          <a:noFill/>
+        </p:spPr>
+        <p:txBody>
+          <a:bodyPr wrap="square">
+            <a:spAutoFit/>
+          </a:bodyPr>
+          <a:lstStyle/>
+          <a:p>
+            <a:pPr>
+              <a:spcAft>
+                <a:spcPts val="600"/>
+              </a:spcAft>
+            </a:pPr>
+            <a:r>
+              <a:rPr sz="1500">
+                <a:solidFill>
+                  <a:srgbClr val="22282E"/>
+                </a:solidFill>
+              </a:rPr>
+              <a:t>•  ZAP no encuentra vulnerabilidades en zonas privadas — Falta contexto de autenticación. Configura usuario y sesión en ZAP.</a:t>
+            </a:r>
+          </a:p>
+          <a:p>
+            <a:pPr>
+              <a:spcAft>
+                <a:spcPts val="600"/>
+              </a:spcAft>
+            </a:pPr>
+            <a:r>
+              <a:rPr sz="1500">
+                <a:solidFill>
+                  <a:srgbClr val="22282E"/>
+                </a:solidFill>
+              </a:rPr>
+              <a:t>•  El active scan corrompe datos de staging — Es esperado: envía ataques reales. Usa datos desechables y snapshots.</a:t>
+            </a:r>
+          </a:p>
+          <a:p>
+            <a:pPr>
+              <a:spcAft>
+                <a:spcPts val="600"/>
+              </a:spcAft>
+            </a:pPr>
+            <a:r>
+              <a:rPr sz="1500">
+                <a:solidFill>
+                  <a:srgbClr val="22282E"/>
+                </a:solidFill>
+              </a:rPr>
+              <a:t>•  Cobertura baja del escaneo — El spider no descubre rutas SPA/JS. Usa el AJAX Spider o alimenta URLs manualmente.</a:t>
+            </a:r>
+          </a:p>
+          <a:p>
+            <a:pPr>
+              <a:spcAft>
+                <a:spcPts val="600"/>
+              </a:spcAft>
+            </a:pPr>
+            <a:r>
+              <a:rPr sz="1500">
+                <a:solidFill>
+                  <a:srgbClr val="22282E"/>
+                </a:solidFill>
+              </a:rPr>
+              <a:t>•  El pipeline falla siempre con las mismas alertas — Falsos positivos no suprimidos. Añade un fichero de reglas con IGNORE.</a:t>
+            </a:r>
+          </a:p>
+          <a:p>
+            <a:pPr>
+              <a:spcAft>
+                <a:spcPts val="600"/>
+              </a:spcAft>
+            </a:pPr>
+            <a:r>
+              <a:rPr sz="1500">
+                <a:solidFill>
+                  <a:srgbClr val="22282E"/>
+                </a:solidFill>
+              </a:rPr>
+              <a:t>•  Se intenta escanear producción — Riesgo legal y de disponibilidad. DAST activo solo en entornos propios/autorizados.</a:t>
+            </a:r>
+          </a:p>
+        </p:txBody>
+      </p:sp>
+    </p:spTree>
+  </p:cSld>
+  <p:clrMapOvr>
+    <a:masterClrMapping/>
+  </p:clrMapOvr>
+</p:sld>
+</file>
+
+<file path=ppt/slides/slide14.xml><?xml version="1.0" encoding="utf-8"?>
+<p:sld xmlns:a="http://schemas.openxmlformats.org/drawingml/2006/main" xmlns:p="http://schemas.openxmlformats.org/presentationml/2006/main" xmlns:r="http://schemas.openxmlformats.org/officeDocument/2006/relationships">
+  <p:cSld>
+    <p:spTree>
+      <p:nvGrpSpPr>
+        <p:cNvPr id="1" name=""/>
+        <p:cNvGrpSpPr/>
+        <p:nvPr/>
+      </p:nvGrpSpPr>
+      <p:grpSpPr/>
+      <p:sp>
+        <p:nvSpPr>
+          <p:cNvPr id="2" name="TextBox 1"/>
+          <p:cNvSpPr txBox="1"/>
+          <p:nvPr/>
+        </p:nvSpPr>
+        <p:spPr>
+          <a:xfrm>
+            <a:off x="457200" y="320040"/>
+            <a:ext cx="8229600" cy="822960"/>
+          </a:xfrm>
+          <a:prstGeom prst="rect">
+            <a:avLst/>
+          </a:prstGeom>
+          <a:noFill/>
+        </p:spPr>
+        <p:txBody>
+          <a:bodyPr wrap="square">
+            <a:spAutoFit/>
+          </a:bodyPr>
+          <a:lstStyle/>
+          <a:p>
+            <a:r>
+              <a:rPr sz="2600" b="1">
+                <a:solidFill>
+                  <a:srgbClr val="0B3D2E"/>
+                </a:solidFill>
+              </a:rPr>
+              <a:t>❓ Preguntas frecuentes</a:t>
+            </a:r>
+          </a:p>
+        </p:txBody>
+      </p:sp>
+      <p:sp>
+        <p:nvSpPr>
+          <p:cNvPr id="3" name="TextBox 2"/>
+          <p:cNvSpPr txBox="1"/>
+          <p:nvPr/>
+        </p:nvSpPr>
+        <p:spPr>
+          <a:xfrm>
+            <a:off x="457200" y="1280160"/>
+            <a:ext cx="8229600" cy="4937760"/>
+          </a:xfrm>
+          <a:prstGeom prst="rect">
+            <a:avLst/>
+          </a:prstGeom>
+          <a:noFill/>
+        </p:spPr>
+        <p:txBody>
+          <a:bodyPr wrap="square">
+            <a:spAutoFit/>
+          </a:bodyPr>
+          <a:lstStyle/>
+          <a:p>
+            <a:pPr>
+              <a:spcAft>
+                <a:spcPts val="600"/>
+              </a:spcAft>
+            </a:pPr>
+            <a:r>
+              <a:rPr sz="1500">
+                <a:solidFill>
+                  <a:srgbClr val="22282E"/>
+                </a:solidFill>
+              </a:rPr>
+              <a:t>•  ❓ ¿Puedo correr DAST en cada PR?</a:t>
+            </a:r>
+          </a:p>
+          <a:p>
+            <a:pPr>
+              <a:spcAft>
+                <a:spcPts val="600"/>
+              </a:spcAft>
+            </a:pPr>
+            <a:r>
+              <a:rPr sz="1500">
+                <a:solidFill>
+                  <a:srgbClr val="22282E"/>
+                </a:solidFill>
+              </a:rPr>
+              <a:t>•  El baseline (pasivo) sí, es rápido y seguro. El active scan es más lento; suele correrse en nightly o antes de release contra staging.</a:t>
+            </a:r>
+          </a:p>
+          <a:p>
+            <a:pPr>
+              <a:spcAft>
+                <a:spcPts val="600"/>
+              </a:spcAft>
+            </a:pPr>
+            <a:r>
+              <a:rPr sz="1500">
+                <a:solidFill>
+                  <a:srgbClr val="22282E"/>
+                </a:solidFill>
+              </a:rPr>
+              <a:t>•  ❓ ¿DAST reemplaza al pentest manual?</a:t>
+            </a:r>
+          </a:p>
+          <a:p>
+            <a:pPr>
+              <a:spcAft>
+                <a:spcPts val="600"/>
+              </a:spcAft>
+            </a:pPr>
+            <a:r>
+              <a:rPr sz="1500">
+                <a:solidFill>
+                  <a:srgbClr val="22282E"/>
+                </a:solidFill>
+              </a:rPr>
+              <a:t>•  No. Automatiza la detección de fallos comunes, pero un pentester encuentra lógica de negocio, cadenas de explotación y bypass de autorización que ninguna herramienta detecta.</a:t>
+            </a:r>
+          </a:p>
+          <a:p>
+            <a:pPr>
+              <a:spcAft>
+                <a:spcPts val="600"/>
+              </a:spcAft>
+            </a:pPr>
+            <a:r>
+              <a:rPr sz="1500">
+                <a:solidFill>
+                  <a:srgbClr val="22282E"/>
+                </a:solidFill>
+              </a:rPr>
+              <a:t>•  ❓ ¿Por qué DAST no ve una inyección que SAST sí?</a:t>
+            </a:r>
+          </a:p>
+          <a:p>
+            <a:pPr>
+              <a:spcAft>
+                <a:spcPts val="600"/>
+              </a:spcAft>
+            </a:pPr>
+            <a:r>
+              <a:rPr sz="1500">
+                <a:solidFill>
+                  <a:srgbClr val="22282E"/>
+                </a:solidFill>
+              </a:rPr>
+              <a:t>•  Si el crawler no llega a esa ruta o no genera el input adecuado, no la ejercita. La cobertura de DAST depende del descubrimiento; por eso SAST y DAST son complementarios.</a:t>
+            </a:r>
+          </a:p>
+          <a:p>
+            <a:pPr>
+              <a:spcAft>
+                <a:spcPts val="600"/>
+              </a:spcAft>
+            </a:pPr>
+            <a:r>
+              <a:rPr sz="1500">
+                <a:solidFill>
+                  <a:srgbClr val="22282E"/>
+                </a:solidFill>
+              </a:rPr>
+              <a:t>•  ❓ ¿Es seguro correr ZAP contra mi app?</a:t>
+            </a:r>
+          </a:p>
+        </p:txBody>
+      </p:sp>
+    </p:spTree>
+  </p:cSld>
+  <p:clrMapOvr>
+    <a:masterClrMapping/>
+  </p:clrMapOvr>
+</p:sld>
+</file>
+
+<file path=ppt/slides/slide15.xml><?xml version="1.0" encoding="utf-8"?>
+<p:sld xmlns:a="http://schemas.openxmlformats.org/drawingml/2006/main" xmlns:p="http://schemas.openxmlformats.org/presentationml/2006/main" xmlns:r="http://schemas.openxmlformats.org/officeDocument/2006/relationships">
+  <p:cSld>
+    <p:spTree>
+      <p:nvGrpSpPr>
+        <p:cNvPr id="1" name=""/>
+        <p:cNvGrpSpPr/>
+        <p:nvPr/>
+      </p:nvGrpSpPr>
+      <p:grpSpPr/>
+      <p:sp>
+        <p:nvSpPr>
+          <p:cNvPr id="2" name="TextBox 1"/>
+          <p:cNvSpPr txBox="1"/>
+          <p:nvPr/>
+        </p:nvSpPr>
+        <p:spPr>
+          <a:xfrm>
+            <a:off x="457200" y="320040"/>
+            <a:ext cx="8229600" cy="822960"/>
+          </a:xfrm>
+          <a:prstGeom prst="rect">
+            <a:avLst/>
+          </a:prstGeom>
+          <a:noFill/>
+        </p:spPr>
+        <p:txBody>
+          <a:bodyPr wrap="square">
+            <a:spAutoFit/>
+          </a:bodyPr>
+          <a:lstStyle/>
+          <a:p>
+            <a:r>
+              <a:rPr sz="2600" b="1">
+                <a:solidFill>
+                  <a:srgbClr val="0B3D2E"/>
+                </a:solidFill>
+              </a:rPr>
+              <a:t>🔗 Referencias</a:t>
+            </a:r>
+          </a:p>
+        </p:txBody>
+      </p:sp>
+      <p:sp>
+        <p:nvSpPr>
+          <p:cNvPr id="3" name="TextBox 2"/>
+          <p:cNvSpPr txBox="1"/>
+          <p:nvPr/>
+        </p:nvSpPr>
+        <p:spPr>
+          <a:xfrm>
+            <a:off x="457200" y="1280160"/>
+            <a:ext cx="8229600" cy="4937760"/>
+          </a:xfrm>
+          <a:prstGeom prst="rect">
+            <a:avLst/>
+          </a:prstGeom>
+          <a:noFill/>
+        </p:spPr>
+        <p:txBody>
+          <a:bodyPr wrap="square">
+            <a:spAutoFit/>
+          </a:bodyPr>
+          <a:lstStyle/>
+          <a:p>
+            <a:pPr>
+              <a:spcAft>
+                <a:spcPts val="600"/>
+              </a:spcAft>
+            </a:pPr>
+            <a:r>
+              <a:rPr sz="1500">
+                <a:solidFill>
+                  <a:srgbClr val="22282E"/>
+                </a:solidFill>
+              </a:rPr>
               <a:t>•  OWASP ZAP — &lt;https://www.zaproxy.org/&gt;</a:t>
             </a:r>
           </a:p>
@@ -3629,6 +4125,81 @@
           </a:p>
         </p:txBody>
       </p:sp>
+    </p:spTree>
+  </p:cSld>
+  <p:clrMapOvr>
+    <a:masterClrMapping/>
+  </p:clrMapOvr>
+</p:sld>
+</file>
+
+<file path=ppt/slides/slide16.xml><?xml version="1.0" encoding="utf-8"?>
+<p:sld xmlns:a="http://schemas.openxmlformats.org/drawingml/2006/main" xmlns:p="http://schemas.openxmlformats.org/presentationml/2006/main" xmlns:r="http://schemas.openxmlformats.org/officeDocument/2006/relationships">
+  <p:cSld>
+    <p:spTree>
+      <p:nvGrpSpPr>
+        <p:cNvPr id="1" name=""/>
+        <p:cNvGrpSpPr/>
+        <p:nvPr/>
+      </p:nvGrpSpPr>
+      <p:grpSpPr/>
+      <p:sp>
+        <p:nvSpPr>
+          <p:cNvPr id="2" name="TextBox 1"/>
+          <p:cNvSpPr txBox="1"/>
+          <p:nvPr/>
+        </p:nvSpPr>
+        <p:spPr>
+          <a:xfrm>
+            <a:off x="457200" y="274320"/>
+            <a:ext cx="8229600" cy="640080"/>
+          </a:xfrm>
+          <a:prstGeom prst="rect">
+            <a:avLst/>
+          </a:prstGeom>
+          <a:noFill/>
+        </p:spPr>
+        <p:txBody>
+          <a:bodyPr wrap="square">
+            <a:spAutoFit/>
+          </a:bodyPr>
+          <a:lstStyle/>
+          <a:p>
+            <a:r>
+              <a:rPr sz="2200" b="1">
+                <a:solidFill>
+                  <a:srgbClr val="0B3D2E"/>
+                </a:solidFill>
+              </a:rPr>
+              <a:t>Diagrama de la clase</a:t>
+            </a:r>
+          </a:p>
+        </p:txBody>
+      </p:sp>
+      <p:pic>
+        <p:nvPicPr>
+          <p:cNvPr id="3" name="Picture 2" descr="df5b9659e31ed71c.png"/>
+          <p:cNvPicPr>
+            <a:picLocks noChangeAspect="1"/>
+          </p:cNvPicPr>
+          <p:nvPr/>
+        </p:nvPicPr>
+        <p:blipFill>
+          <a:blip r:embed="rId2"/>
+          <a:stretch>
+            <a:fillRect/>
+          </a:stretch>
+        </p:blipFill>
+        <p:spPr>
+          <a:xfrm>
+            <a:off x="457200" y="2958084"/>
+            <a:ext cx="8229600" cy="1581912"/>
+          </a:xfrm>
+          <a:prstGeom prst="rect">
+            <a:avLst/>
+          </a:prstGeom>
+        </p:spPr>
+      </p:pic>
     </p:spTree>
   </p:cSld>
   <p:clrMapOvr>
@@ -4167,7 +4738,7 @@
                   <a:srgbClr val="0B3D2E"/>
                 </a:solidFill>
               </a:rPr>
-              <a:t>📖 Definiciones y características</a:t>
+              <a:t>🧠 Explicación en profundidad</a:t>
             </a:r>
           </a:p>
         </p:txBody>
@@ -4205,82 +4776,82 @@
                   <a:srgbClr val="22282E"/>
                 </a:solidFill>
               </a:rPr>
-              <a:t>•  DAST: prueba de seguridad sobre la app en ejecución sin acceso al código. Característica: encuentra fallos de runtime/config; ciego a código no alcanzado por el crawler.</a:t>
-            </a:r>
-          </a:p>
-          <a:p>
-            <a:pPr>
-              <a:spcAft>
-                <a:spcPts val="600"/>
-              </a:spcAft>
-            </a:pPr>
-            <a:r>
-              <a:rPr sz="1500">
-                <a:solidFill>
-                  <a:srgbClr val="22282E"/>
-                </a:solidFill>
-              </a:rPr>
-              <a:t>•  Baseline scan: escaneo pasivo rápido que solo observa el tráfico. Característica: seguro para CI, no envía ataques.</a:t>
-            </a:r>
-          </a:p>
-          <a:p>
-            <a:pPr>
-              <a:spcAft>
-                <a:spcPts val="600"/>
-              </a:spcAft>
-            </a:pPr>
-            <a:r>
-              <a:rPr sz="1500">
-                <a:solidFill>
-                  <a:srgbClr val="22282E"/>
-                </a:solidFill>
-              </a:rPr>
-              <a:t>•  Active scan: envía payloads para provocar vulnerabilidades. Característica: puede modificar datos; se corre contra staging, nunca producción sin permiso.</a:t>
-            </a:r>
-          </a:p>
-          <a:p>
-            <a:pPr>
-              <a:spcAft>
-                <a:spcPts val="600"/>
-              </a:spcAft>
-            </a:pPr>
-            <a:r>
-              <a:rPr sz="1500">
-                <a:solidFill>
-                  <a:srgbClr val="22282E"/>
-                </a:solidFill>
-              </a:rPr>
-              <a:t>•  Spider/crawler: recorre la app descubriendo URLs y formularios. Característica: la cobertura del escaneo depende de qué descubra.</a:t>
-            </a:r>
-          </a:p>
-          <a:p>
-            <a:pPr>
-              <a:spcAft>
-                <a:spcPts val="600"/>
-              </a:spcAft>
-            </a:pPr>
-            <a:r>
-              <a:rPr sz="1500">
-                <a:solidFill>
-                  <a:srgbClr val="22282E"/>
-                </a:solidFill>
-              </a:rPr>
-              <a:t>•  IAST: instrumenta la app para observar desde dentro durante las pruebas. Característica: combina visibilidad de SAST con ejecución de DAST.</a:t>
-            </a:r>
-          </a:p>
-          <a:p>
-            <a:pPr>
-              <a:spcAft>
-                <a:spcPts val="600"/>
-              </a:spcAft>
-            </a:pPr>
-            <a:r>
-              <a:rPr sz="1500">
-                <a:solidFill>
-                  <a:srgbClr val="22282E"/>
-                </a:solidFill>
-              </a:rPr>
-              <a:t>•  Contexto de autenticación: configuración para que ZAP mantenga sesión. Característica: imprescindible para probar áreas protegidas.</a:t>
+              <a:t>•  Un analizador dinámico interactúa con una aplicación en ejecución como lo haría un cliente: descubre rutas, envía variaciones, observa códigos, cabeceras, cuerpos, tiempos y efectos. Esa perspectiva…</a:t>
+            </a:r>
+          </a:p>
+          <a:p>
+            <a:pPr>
+              <a:spcAft>
+                <a:spcPts val="600"/>
+              </a:spcAft>
+            </a:pPr>
+            <a:r>
+              <a:rPr sz="1500">
+                <a:solidFill>
+                  <a:srgbClr val="22282E"/>
+                </a:solidFill>
+              </a:rPr>
+              <a:t>•  El diagrama separa cobertura de ataque. Primero se ofrecen semillas y contextos; después el crawler construye un mapa; solo entonces el escáner activo prueba parámetros. Un informe con cero alertas y…</a:t>
+            </a:r>
+          </a:p>
+          <a:p>
+            <a:pPr>
+              <a:spcAft>
+                <a:spcPts val="600"/>
+              </a:spcAft>
+            </a:pPr>
+            <a:r>
+              <a:rPr sz="1500">
+                <a:solidFill>
+                  <a:srgbClr val="22282E"/>
+                </a:solidFill>
+              </a:rPr>
+              <a:t>•  El baseline scan de ZAP es principalmente pasivo: inspecciona el tráfico generado al recorrer el sitio y es apropiado para una comprobación frecuente. El escaneo activo envía cargas que pueden crear…</a:t>
+            </a:r>
+          </a:p>
+          <a:p>
+            <a:pPr>
+              <a:spcAft>
+                <a:spcPts val="600"/>
+              </a:spcAft>
+            </a:pPr>
+            <a:r>
+              <a:rPr sz="1500">
+                <a:solidFill>
+                  <a:srgbClr val="22282E"/>
+                </a:solidFill>
+              </a:rPr>
+              <a:t>•  La autenticación debe modelarse como parte del experimento. Una sesión expirada puede convertir todas las respuestas en la página de login y producir una falsa sensación de cobertura. Para probar…</a:t>
+            </a:r>
+          </a:p>
+          <a:p>
+            <a:pPr>
+              <a:spcAft>
+                <a:spcPts val="600"/>
+              </a:spcAft>
+            </a:pPr>
+            <a:r>
+              <a:rPr sz="1500">
+                <a:solidFill>
+                  <a:srgbClr val="22282E"/>
+                </a:solidFill>
+              </a:rPr>
+              <a:t>•  Un hallazgo dinámico se conserva con petición, respuesta mínima, precondiciones, efecto y pasos de repetición. Las diferencias temporales deben repetirse y compararse con controles; reflejar una…</a:t>
+            </a:r>
+          </a:p>
+          <a:p>
+            <a:pPr>
+              <a:spcAft>
+                <a:spcPts val="600"/>
+              </a:spcAft>
+            </a:pPr>
+            <a:r>
+              <a:rPr sz="1500">
+                <a:solidFill>
+                  <a:srgbClr val="22282E"/>
+                </a:solidFill>
+              </a:rPr>
+              <a:t>•  Un pipeline informa cero alertas. El mapa de sitios contiene /login y recursos estáticos, pero ninguna ruta /api/orders. La cookie de prueba expiró y el proxy siguió una redirección silenciosa. El…</a:t>
             </a:r>
           </a:p>
         </p:txBody>
@@ -4331,7 +4902,7 @@
                   <a:srgbClr val="0B3D2E"/>
                 </a:solidFill>
               </a:rPr>
-              <a:t>🧰 Herramientas y preparación</a:t>
+              <a:t>📔 Glosario operativo</a:t>
             </a:r>
           </a:p>
         </p:txBody>
@@ -4369,97 +4940,82 @@
                   <a:srgbClr val="22282E"/>
                 </a:solidFill>
               </a:rPr>
-              <a:t>•  OWASP ZAP (Zed Attack Proxy) — DAST open source de referencia.</a:t>
-            </a:r>
-          </a:p>
-          <a:p>
-            <a:pPr>
-              <a:spcAft>
-                <a:spcPts val="600"/>
-              </a:spcAft>
-            </a:pPr>
-            <a:r>
-              <a:rPr sz="1500">
-                <a:solidFill>
-                  <a:srgbClr val="22282E"/>
-                </a:solidFill>
-              </a:rPr>
-              <a:t>•  Nikto para chequeos rápidos de servidor web (complementario).</a:t>
-            </a:r>
-          </a:p>
-          <a:p>
-            <a:pPr>
-              <a:spcAft>
-                <a:spcPts val="600"/>
-              </a:spcAft>
-            </a:pPr>
-            <a:r>
-              <a:rPr sz="1500">
-                <a:solidFill>
-                  <a:srgbClr val="22282E"/>
-                </a:solidFill>
-              </a:rPr>
-              <a:t>•  Una app de práctica propia desplegada en local/staging: OWASP Juice Shop es ideal.</a:t>
-            </a:r>
-          </a:p>
-          <a:p>
-            <a:pPr>
-              <a:spcAft>
-                <a:spcPts val="600"/>
-              </a:spcAft>
-            </a:pPr>
-            <a:r>
-              <a:rPr sz="1500">
-                <a:solidFill>
-                  <a:srgbClr val="22282E"/>
-                </a:solidFill>
-              </a:rPr>
-              <a:t>•  Levantar el objetivo de práctica y ZAP con Docker:</a:t>
-            </a:r>
-          </a:p>
-          <a:p>
-            <a:pPr>
-              <a:spcAft>
-                <a:spcPts val="600"/>
-              </a:spcAft>
-            </a:pPr>
-            <a:r>
-              <a:rPr sz="1500">
-                <a:solidFill>
-                  <a:srgbClr val="22282E"/>
-                </a:solidFill>
-              </a:rPr>
-              <a:t>•  docker run --rm -p 3000:3000 bkimminich/juice-shop</a:t>
-            </a:r>
-          </a:p>
-          <a:p>
-            <a:pPr>
-              <a:spcAft>
-                <a:spcPts val="600"/>
-              </a:spcAft>
-            </a:pPr>
-            <a:r>
-              <a:rPr sz="1500">
-                <a:solidFill>
-                  <a:srgbClr val="22282E"/>
-                </a:solidFill>
-              </a:rPr>
-              <a:t>•  docker run --rm -t ghcr.io/zaproxy/zaproxy:stable \</a:t>
-            </a:r>
-          </a:p>
-          <a:p>
-            <a:pPr>
-              <a:spcAft>
-                <a:spcPts val="600"/>
-              </a:spcAft>
-            </a:pPr>
-            <a:r>
-              <a:rPr sz="1500">
-                <a:solidFill>
-                  <a:srgbClr val="22282E"/>
-                </a:solidFill>
-              </a:rPr>
-              <a:t>•  zap-baseline.py -t http://host.docker.internal:3000 -r reporte.html</a:t>
+              <a:t>•  Término — Definición útil</a:t>
+            </a:r>
+          </a:p>
+          <a:p>
+            <a:pPr>
+              <a:spcAft>
+                <a:spcPts val="600"/>
+              </a:spcAft>
+            </a:pPr>
+            <a:r>
+              <a:rPr sz="1500">
+                <a:solidFill>
+                  <a:srgbClr val="22282E"/>
+                </a:solidFill>
+              </a:rPr>
+              <a:t>•  Crawler — Componente que descubre rutas y transiciones accesibles.</a:t>
+            </a:r>
+          </a:p>
+          <a:p>
+            <a:pPr>
+              <a:spcAft>
+                <a:spcPts val="600"/>
+              </a:spcAft>
+            </a:pPr>
+            <a:r>
+              <a:rPr sz="1500">
+                <a:solidFill>
+                  <a:srgbClr val="22282E"/>
+                </a:solidFill>
+              </a:rPr>
+              <a:t>•  Escaneo pasivo — Análisis del tráfico observado sin enviar cargas de ataque.</a:t>
+            </a:r>
+          </a:p>
+          <a:p>
+            <a:pPr>
+              <a:spcAft>
+                <a:spcPts val="600"/>
+              </a:spcAft>
+            </a:pPr>
+            <a:r>
+              <a:rPr sz="1500">
+                <a:solidFill>
+                  <a:srgbClr val="22282E"/>
+                </a:solidFill>
+              </a:rPr>
+              <a:t>•  Escaneo activo — Pruebas que modifican deliberadamente entradas y pueden alterar el objetivo.</a:t>
+            </a:r>
+          </a:p>
+          <a:p>
+            <a:pPr>
+              <a:spcAft>
+                <a:spcPts val="600"/>
+              </a:spcAft>
+            </a:pPr>
+            <a:r>
+              <a:rPr sz="1500">
+                <a:solidFill>
+                  <a:srgbClr val="22282E"/>
+                </a:solidFill>
+              </a:rPr>
+              <a:t>•  Contexto — Alcance, autenticación y reglas usadas para explorar una aplicación.</a:t>
+            </a:r>
+          </a:p>
+          <a:p>
+            <a:pPr>
+              <a:spcAft>
+                <a:spcPts val="600"/>
+              </a:spcAft>
+            </a:pPr>
+            <a:r>
+              <a:rPr sz="1500">
+                <a:solidFill>
+                  <a:srgbClr val="22282E"/>
+                </a:solidFill>
+              </a:rPr>
+              <a:t>•  Oráculo — Condición observable que permite decidir si una prueba pasó o falló.</a:t>
             </a:r>
           </a:p>
         </p:txBody>
@@ -4510,7 +5066,7 @@
                   <a:srgbClr val="0B3D2E"/>
                 </a:solidFill>
               </a:rPr>
-              <a:t>🧪 Laboratorio guiado</a:t>
+              <a:t>✅ Criterio de dominio</a:t>
             </a:r>
           </a:p>
         </p:txBody>
@@ -4548,97 +5104,7 @@
                   <a:srgbClr val="22282E"/>
                 </a:solidFill>
               </a:rPr>
-              <a:t>•  Despliega tu objetivo. Levanta Juice Shop en localhost:3000 (es una app diseñada para practicar).</a:t>
-            </a:r>
-          </a:p>
-          <a:p>
-            <a:pPr>
-              <a:spcAft>
-                <a:spcPts val="600"/>
-              </a:spcAft>
-            </a:pPr>
-            <a:r>
-              <a:rPr sz="1500">
-                <a:solidFill>
-                  <a:srgbClr val="22282E"/>
-                </a:solidFill>
-              </a:rPr>
-              <a:t>•  Escaneo baseline (pasivo):</a:t>
-            </a:r>
-          </a:p>
-          <a:p>
-            <a:pPr>
-              <a:spcAft>
-                <a:spcPts val="600"/>
-              </a:spcAft>
-            </a:pPr>
-            <a:r>
-              <a:rPr sz="1500">
-                <a:solidFill>
-                  <a:srgbClr val="22282E"/>
-                </a:solidFill>
-              </a:rPr>
-              <a:t>•  docker run --rm -t ghcr.io/zaproxy/zaproxy:stable \</a:t>
-            </a:r>
-          </a:p>
-          <a:p>
-            <a:pPr>
-              <a:spcAft>
-                <a:spcPts val="600"/>
-              </a:spcAft>
-            </a:pPr>
-            <a:r>
-              <a:rPr sz="1500">
-                <a:solidFill>
-                  <a:srgbClr val="22282E"/>
-                </a:solidFill>
-              </a:rPr>
-              <a:t>•  zap-baseline.py -t http://host.docker.internal:3000 -r baseline.html -I</a:t>
-            </a:r>
-          </a:p>
-          <a:p>
-            <a:pPr>
-              <a:spcAft>
-                <a:spcPts val="600"/>
-              </a:spcAft>
-            </a:pPr>
-            <a:r>
-              <a:rPr sz="1500">
-                <a:solidFill>
-                  <a:srgbClr val="22282E"/>
-                </a:solidFill>
-              </a:rPr>
-              <a:t>•  Revisa el informe: cabeceras faltantes (CSP, HSTS), cookies inseguras.</a:t>
-            </a:r>
-          </a:p>
-          <a:p>
-            <a:pPr>
-              <a:spcAft>
-                <a:spcPts val="600"/>
-              </a:spcAft>
-            </a:pPr>
-            <a:r>
-              <a:rPr sz="1500">
-                <a:solidFill>
-                  <a:srgbClr val="22282E"/>
-                </a:solidFill>
-              </a:rPr>
-              <a:t>•  Escaneo full/activo contra staging (nunca producción):</a:t>
-            </a:r>
-          </a:p>
-          <a:p>
-            <a:pPr>
-              <a:spcAft>
-                <a:spcPts val="600"/>
-              </a:spcAft>
-            </a:pPr>
-            <a:r>
-              <a:rPr sz="1500">
-                <a:solidFill>
-                  <a:srgbClr val="22282E"/>
-                </a:solidFill>
-              </a:rPr>
-              <a:t>•  docker run --rm -t ghcr.io/zaproxy/zaproxy:stable \</a:t>
+              <a:t>•  El alumno demuestra dominio cuando puede configurar un objetivo autorizado, medir cobertura antes de interpretar resultados, conservar una sesión válida, reproducir una alerta con evidencia y…</a:t>
             </a:r>
           </a:p>
         </p:txBody>
@@ -4689,7 +5155,7 @@
                   <a:srgbClr val="0B3D2E"/>
                 </a:solidFill>
               </a:rPr>
-              <a:t>✍️ Ejercicios</a:t>
+              <a:t>📖 Definiciones y características</a:t>
             </a:r>
           </a:p>
         </p:txBody>
@@ -4727,82 +5193,82 @@
                   <a:srgbClr val="22282E"/>
                 </a:solidFill>
               </a:rPr>
-              <a:t>•  Ejecuta un baseline scan y lista las cabeceras de seguridad ausentes.</a:t>
-            </a:r>
-          </a:p>
-          <a:p>
-            <a:pPr>
-              <a:spcAft>
-                <a:spcPts val="600"/>
-              </a:spcAft>
-            </a:pPr>
-            <a:r>
-              <a:rPr sz="1500">
-                <a:solidFill>
-                  <a:srgbClr val="22282E"/>
-                </a:solidFill>
-              </a:rPr>
-              <a:t>•  Configura ZAP para escanear una zona autenticada de la app.</a:t>
-            </a:r>
-          </a:p>
-          <a:p>
-            <a:pPr>
-              <a:spcAft>
-                <a:spcPts val="600"/>
-              </a:spcAft>
-            </a:pPr>
-            <a:r>
-              <a:rPr sz="1500">
-                <a:solidFill>
-                  <a:srgbClr val="22282E"/>
-                </a:solidFill>
-              </a:rPr>
-              <a:t>•  Integra zap-baseline en un pipeline y haz que falle con hallazgos High.</a:t>
-            </a:r>
-          </a:p>
-          <a:p>
-            <a:pPr>
-              <a:spcAft>
-                <a:spcPts val="600"/>
-              </a:spcAft>
-            </a:pPr>
-            <a:r>
-              <a:rPr sz="1500">
-                <a:solidFill>
-                  <a:srgbClr val="22282E"/>
-                </a:solidFill>
-              </a:rPr>
-              <a:t>•  Crea un fichero de reglas que suprima dos falsos positivos.</a:t>
-            </a:r>
-          </a:p>
-          <a:p>
-            <a:pPr>
-              <a:spcAft>
-                <a:spcPts val="600"/>
-              </a:spcAft>
-            </a:pPr>
-            <a:r>
-              <a:rPr sz="1500">
-                <a:solidFill>
-                  <a:srgbClr val="22282E"/>
-                </a:solidFill>
-              </a:rPr>
-              <a:t>•  Compara el tiempo y la cobertura entre baseline y full scan.</a:t>
-            </a:r>
-          </a:p>
-          <a:p>
-            <a:pPr>
-              <a:spcAft>
-                <a:spcPts val="600"/>
-              </a:spcAft>
-            </a:pPr>
-            <a:r>
-              <a:rPr sz="1500">
-                <a:solidFill>
-                  <a:srgbClr val="22282E"/>
-                </a:solidFill>
-              </a:rPr>
-              <a:t>•  Diseña un escenario donde IAST sería mejor que DAST puro.</a:t>
+              <a:t>•  DAST: prueba de seguridad sobre la app en ejecución sin acceso al código. Característica: encuentra fallos de runtime/config; ciego a código no alcanzado por el crawler.</a:t>
+            </a:r>
+          </a:p>
+          <a:p>
+            <a:pPr>
+              <a:spcAft>
+                <a:spcPts val="600"/>
+              </a:spcAft>
+            </a:pPr>
+            <a:r>
+              <a:rPr sz="1500">
+                <a:solidFill>
+                  <a:srgbClr val="22282E"/>
+                </a:solidFill>
+              </a:rPr>
+              <a:t>•  Baseline scan: escaneo pasivo rápido que solo observa el tráfico. Característica: seguro para CI, no envía ataques.</a:t>
+            </a:r>
+          </a:p>
+          <a:p>
+            <a:pPr>
+              <a:spcAft>
+                <a:spcPts val="600"/>
+              </a:spcAft>
+            </a:pPr>
+            <a:r>
+              <a:rPr sz="1500">
+                <a:solidFill>
+                  <a:srgbClr val="22282E"/>
+                </a:solidFill>
+              </a:rPr>
+              <a:t>•  Active scan: envía payloads para provocar vulnerabilidades. Característica: puede modificar datos; se corre contra staging, nunca producción sin permiso.</a:t>
+            </a:r>
+          </a:p>
+          <a:p>
+            <a:pPr>
+              <a:spcAft>
+                <a:spcPts val="600"/>
+              </a:spcAft>
+            </a:pPr>
+            <a:r>
+              <a:rPr sz="1500">
+                <a:solidFill>
+                  <a:srgbClr val="22282E"/>
+                </a:solidFill>
+              </a:rPr>
+              <a:t>•  Spider/crawler: recorre la app descubriendo URLs y formularios. Característica: la cobertura del escaneo depende de qué descubra.</a:t>
+            </a:r>
+          </a:p>
+          <a:p>
+            <a:pPr>
+              <a:spcAft>
+                <a:spcPts val="600"/>
+              </a:spcAft>
+            </a:pPr>
+            <a:r>
+              <a:rPr sz="1500">
+                <a:solidFill>
+                  <a:srgbClr val="22282E"/>
+                </a:solidFill>
+              </a:rPr>
+              <a:t>•  IAST: instrumenta la app para observar desde dentro durante las pruebas. Característica: combina visibilidad de SAST con ejecución de DAST.</a:t>
+            </a:r>
+          </a:p>
+          <a:p>
+            <a:pPr>
+              <a:spcAft>
+                <a:spcPts val="600"/>
+              </a:spcAft>
+            </a:pPr>
+            <a:r>
+              <a:rPr sz="1500">
+                <a:solidFill>
+                  <a:srgbClr val="22282E"/>
+                </a:solidFill>
+              </a:rPr>
+              <a:t>•  Contexto de autenticación: configuración para que ZAP mantenga sesión. Característica: imprescindible para probar áreas protegidas.</a:t>
             </a:r>
           </a:p>
         </p:txBody>
@@ -4853,7 +5319,7 @@
                   <a:srgbClr val="0B3D2E"/>
                 </a:solidFill>
               </a:rPr>
-              <a:t>📝 Reto verificable</a:t>
+              <a:t>🧰 Herramientas y preparación</a:t>
             </a:r>
           </a:p>
         </p:txBody>
@@ -4891,67 +5357,52 @@
                   <a:srgbClr val="22282E"/>
                 </a:solidFill>
               </a:rPr>
-              <a:t>•  Automatiza un escaneo DAST autenticado en CI contra un entorno de staging efímero.</a:t>
-            </a:r>
-          </a:p>
-          <a:p>
-            <a:pPr>
-              <a:spcAft>
-                <a:spcPts val="600"/>
-              </a:spcAft>
-            </a:pPr>
-            <a:r>
-              <a:rPr sz="1500">
-                <a:solidFill>
-                  <a:srgbClr val="22282E"/>
-                </a:solidFill>
-              </a:rPr>
-              <a:t>•  Criterio de aceptación: (a) el pipeline despliega la app en un contenedor temporal; (b)</a:t>
-            </a:r>
-          </a:p>
-          <a:p>
-            <a:pPr>
-              <a:spcAft>
-                <a:spcPts val="600"/>
-              </a:spcAft>
-            </a:pPr>
-            <a:r>
-              <a:rPr sz="1500">
-                <a:solidFill>
-                  <a:srgbClr val="22282E"/>
-                </a:solidFill>
-              </a:rPr>
-              <a:t>•  ZAP escanea con sesión autenticada válida; (c) el job publica el informe HTML como artefacto;</a:t>
-            </a:r>
-          </a:p>
-          <a:p>
-            <a:pPr>
-              <a:spcAft>
-                <a:spcPts val="600"/>
-              </a:spcAft>
-            </a:pPr>
-            <a:r>
-              <a:rPr sz="1500">
-                <a:solidFill>
-                  <a:srgbClr val="22282E"/>
-                </a:solidFill>
-              </a:rPr>
-              <a:t>•  (d) el build falla si hay vulnerabilidades por encima de un umbral definido; y (e) existe un</a:t>
-            </a:r>
-          </a:p>
-          <a:p>
-            <a:pPr>
-              <a:spcAft>
-                <a:spcPts val="600"/>
-              </a:spcAft>
-            </a:pPr>
-            <a:r>
-              <a:rPr sz="1500">
-                <a:solidFill>
-                  <a:srgbClr val="22282E"/>
-                </a:solidFill>
-              </a:rPr>
-              <a:t>•  fichero de reglas que suprime al menos un falso positivo justificado.</a:t>
+              <a:t>•  OWASP ZAP (Zed Attack Proxy) — DAST open source de referencia.</a:t>
+            </a:r>
+          </a:p>
+          <a:p>
+            <a:pPr>
+              <a:spcAft>
+                <a:spcPts val="600"/>
+              </a:spcAft>
+            </a:pPr>
+            <a:r>
+              <a:rPr sz="1500">
+                <a:solidFill>
+                  <a:srgbClr val="22282E"/>
+                </a:solidFill>
+              </a:rPr>
+              <a:t>•  Nikto para chequeos rápidos de servidor web (complementario).</a:t>
+            </a:r>
+          </a:p>
+          <a:p>
+            <a:pPr>
+              <a:spcAft>
+                <a:spcPts val="600"/>
+              </a:spcAft>
+            </a:pPr>
+            <a:r>
+              <a:rPr sz="1500">
+                <a:solidFill>
+                  <a:srgbClr val="22282E"/>
+                </a:solidFill>
+              </a:rPr>
+              <a:t>•  Una app de práctica propia desplegada en local/staging: OWASP Juice Shop es ideal.</a:t>
+            </a:r>
+          </a:p>
+          <a:p>
+            <a:pPr>
+              <a:spcAft>
+                <a:spcPts val="600"/>
+              </a:spcAft>
+            </a:pPr>
+            <a:r>
+              <a:rPr sz="1500">
+                <a:solidFill>
+                  <a:srgbClr val="22282E"/>
+                </a:solidFill>
+              </a:rPr>
+              <a:t>•  Levantar el objetivo de práctica y ZAP con Docker:</a:t>
             </a:r>
           </a:p>
         </p:txBody>
